--- a/decks/triple-b5/triple-b5_ch3_culturing.pptx
+++ b/decks/triple-b5/triple-b5_ch3_culturing.pptx
@@ -126,30 +126,30 @@
   <p:extLst>
     <p:ext uri="{521415D9-36F7-43E2-AB2F-B90AF26B5E84}">
       <p14:sectionLst xmlns:p14="http://schemas.microsoft.com/office/powerpoint/2010/main">
-        <p14:section name="Opening" id="{bf8e7615-0aab-7f61-6e3a-a117b92171dc}">
+        <p14:section name="Opening" id="{f9b884e1-ee2b-838f-f5b7-597d0667e7a4}">
           <p14:sldIdLst>
             <p14:sldId id="256"/>
           </p14:sldIdLst>
         </p14:section>
-        <p14:section name="Gate" id="{fceaafdd-81ae-29b2-8230-ba684c0244f2}">
+        <p14:section name="Gate" id="{28e8ee57-df57-174d-b6ba-8d14799c8dd9}">
           <p14:sldIdLst>
             <p14:sldId id="257"/>
             <p14:sldId id="258"/>
           </p14:sldIdLst>
         </p14:section>
-        <p14:section name="Pre-teach" id="{db37c866-5e29-d724-09c9-d96f7ef2aa71}">
+        <p14:section name="Pre-teach" id="{873c02bf-744d-1785-145b-cf3ae4d9b9fe}">
           <p14:sldIdLst>
             <p14:sldId id="259"/>
             <p14:sldId id="260"/>
           </p14:sldIdLst>
         </p14:section>
-        <p14:section name="Read-along" id="{9a9104f4-b447-9113-daeb-85c7707c13b3}">
+        <p14:section name="Read-along" id="{dceeb325-4029-bb89-70a5-e34824db00fb}">
           <p14:sldIdLst>
             <p14:sldId id="261"/>
             <p14:sldId id="262"/>
           </p14:sldIdLst>
         </p14:section>
-        <p14:section name="Teach" id="{9846b793-4c6d-50a4-a207-af11f0082e8f}">
+        <p14:section name="Teach" id="{f2a0bddc-235c-4422-2be0-e28e472c6f36}">
           <p14:sldIdLst>
             <p14:sldId id="263"/>
             <p14:sldId id="264"/>
@@ -160,18 +160,18 @@
             <p14:sldId id="269"/>
           </p14:sldIdLst>
         </p14:section>
-        <p14:section name="Routes" id="{6744f413-6570-1f82-1500-8353530a0d15}">
+        <p14:section name="Routes" id="{fbc4d839-d2a7-a244-7d63-13317da70417}">
           <p14:sldIdLst>
             <p14:sldId id="270"/>
             <p14:sldId id="271"/>
           </p14:sldIdLst>
         </p14:section>
-        <p14:section name="Close" id="{65a05b2c-8157-edb2-718f-e87b8f972487}">
+        <p14:section name="Close" id="{51074916-4804-1060-cbec-b9086b81ba51}">
           <p14:sldIdLst>
             <p14:sldId id="272"/>
           </p14:sldIdLst>
         </p14:section>
-        <p14:section name="Answers" id="{f8632144-22df-e8d9-c090-97d827f92e88}">
+        <p14:section name="Answers" id="{bb8e0f26-f456-8957-c5d1-4156284ded4f}">
           <p14:sldIdLst>
             <p14:sldId id="273"/>
             <p14:sldId id="274"/>
@@ -1599,7 +1599,7 @@
               <a:t>Do now — retrieval. Silent, no notes, no help: recall comes before any support. Give about four minutes.
 1. Bacteria reproduce by a type of simple cell division called ___.  →  binary fission
 2. A bacterium has a mean division time of 30 minutes. How many times will it divide in 3 hours?  →  6 divisions
-3. Why are Petri dishes incubated at 25 °C, not 37 °C, in a school laboratory?  →  A   Harmful pathogens that live in the human body are less likely to grow
+3. Why are Petri dishes incubated at 25 °C, not 37 °C, in a school laboratory?  →  C   Harmful pathogens that live in the human body are less likely to grow
 Circulate: who gets 3/3 (Stretch route), 2/3 (Core), 0–1 (Support)? Use this to route pupils later in the lesson.</a:t>
             </a:r>
             <a:endParaRPr lang="en-US" dirty="0"/>
@@ -1782,7 +1782,7 @@
               <a:t>Answers — pupils mark their own in a different colour, then hands up for 3/3, 2/3, 1/3.
 1. binary fission. Bacteria divide in two by binary fission. The population doubles with every division.
 2. 6 divisions. Exact: 3 hours = 180 minutes, and 180 ÷ 30 = 6 divisions.
-3. A   Harmful pathogens that live in the human body are less likely to grow. 37 °C is human body temperature, so bacteria that are dangerous to people would grow well. 25 °C reduces that risk.
+3. C   Harmful pathogens that live in the human body are less likely to grow. 37 °C is human body temperature, so bacteria that are dangerous to people would grow well. 25 °C reduces that risk.
 Say the route each score points to: 3/3 Stretch, 2/3 Core, 0–1 Support. Pupils may choose to move up.</a:t>
             </a:r>
             <a:endParaRPr lang="en-US" dirty="0"/>
@@ -11924,7 +11924,7 @@
                 <a:ea typeface="Calibri" pitchFamily="34" charset="-122"/>
                 <a:cs typeface="Calibri" pitchFamily="34" charset="-120"/>
               </a:rPr>
-              <a:t>Harmful pathogens that live in the human body are less likely to grow</a:t>
+              <a:t>The agar melts above 25 °C</a:t>
             </a:r>
             <a:endParaRPr lang="en-US" sz="2200" dirty="0"/>
           </a:p>
@@ -11998,7 +11998,7 @@
                 <a:ea typeface="Calibri" pitchFamily="34" charset="-122"/>
                 <a:cs typeface="Calibri" pitchFamily="34" charset="-120"/>
               </a:rPr>
-              <a:t>The agar melts above 25 °C</a:t>
+              <a:t>Harmful pathogens that live in the human body are less likely to grow</a:t>
             </a:r>
             <a:endParaRPr lang="en-US" sz="2200" dirty="0"/>
           </a:p>
@@ -13543,7 +13543,7 @@
                 <a:ea typeface="Calibri" pitchFamily="34" charset="-122"/>
                 <a:cs typeface="Calibri" pitchFamily="34" charset="-120"/>
               </a:rPr>
-              <a:t>A   Harmful pathogens that live in the human body are less likely to grow</a:t>
+              <a:t>C   Harmful pathogens that live in the human body are less likely to grow</a:t>
             </a:r>
             <a:endParaRPr lang="en-US" sz="2200" dirty="0"/>
           </a:p>

--- a/decks/triple-b5/triple-b5_ch3_culturing.pptx
+++ b/decks/triple-b5/triple-b5_ch3_culturing.pptx
@@ -126,30 +126,30 @@
   <p:extLst>
     <p:ext uri="{521415D9-36F7-43E2-AB2F-B90AF26B5E84}">
       <p14:sectionLst xmlns:p14="http://schemas.microsoft.com/office/powerpoint/2010/main">
-        <p14:section name="Opening" id="{f9b884e1-ee2b-838f-f5b7-597d0667e7a4}">
+        <p14:section name="Opening" id="{337f9537-2f70-cd45-abac-3cc6a8231c40}">
           <p14:sldIdLst>
             <p14:sldId id="256"/>
           </p14:sldIdLst>
         </p14:section>
-        <p14:section name="Gate" id="{28e8ee57-df57-174d-b6ba-8d14799c8dd9}">
+        <p14:section name="Gate" id="{e2a16ac9-f001-c3ec-1504-cda60d35fee8}">
           <p14:sldIdLst>
             <p14:sldId id="257"/>
             <p14:sldId id="258"/>
           </p14:sldIdLst>
         </p14:section>
-        <p14:section name="Pre-teach" id="{873c02bf-744d-1785-145b-cf3ae4d9b9fe}">
+        <p14:section name="Pre-teach" id="{447593e1-1783-1827-775a-854b03e00466}">
           <p14:sldIdLst>
             <p14:sldId id="259"/>
             <p14:sldId id="260"/>
           </p14:sldIdLst>
         </p14:section>
-        <p14:section name="Read-along" id="{dceeb325-4029-bb89-70a5-e34824db00fb}">
+        <p14:section name="Read-along" id="{18e56a36-5d77-c620-9fe1-0fd9bbb34817}">
           <p14:sldIdLst>
             <p14:sldId id="261"/>
             <p14:sldId id="262"/>
           </p14:sldIdLst>
         </p14:section>
-        <p14:section name="Teach" id="{f2a0bddc-235c-4422-2be0-e28e472c6f36}">
+        <p14:section name="Teach" id="{65e127cf-7da0-001f-9ee7-f6607f372964}">
           <p14:sldIdLst>
             <p14:sldId id="263"/>
             <p14:sldId id="264"/>
@@ -160,18 +160,18 @@
             <p14:sldId id="269"/>
           </p14:sldIdLst>
         </p14:section>
-        <p14:section name="Routes" id="{fbc4d839-d2a7-a244-7d63-13317da70417}">
+        <p14:section name="Routes" id="{fbc3aca8-199d-e4d9-f729-4c0afee6a120}">
           <p14:sldIdLst>
             <p14:sldId id="270"/>
             <p14:sldId id="271"/>
           </p14:sldIdLst>
         </p14:section>
-        <p14:section name="Close" id="{51074916-4804-1060-cbec-b9086b81ba51}">
+        <p14:section name="Close" id="{ef1b9e7f-f99c-ca4d-8aa8-5792319fa0a4}">
           <p14:sldIdLst>
             <p14:sldId id="272"/>
           </p14:sldIdLst>
         </p14:section>
-        <p14:section name="Answers" id="{bb8e0f26-f456-8957-c5d1-4156284ded4f}">
+        <p14:section name="Answers" id="{2d9acabd-9908-4955-be08-74b02b090770}">
           <p14:sldIdLst>
             <p14:sldId id="273"/>
             <p14:sldId id="274"/>
